--- a/web/public/seminars/necchu.pptx
+++ b/web/public/seminars/necchu.pptx
@@ -3424,7 +3424,7 @@
                 <a:latin typeface="Meiryo"/>
                 <a:ea typeface="Meiryo"/>
               </a:rPr>
-              <a:t>基発0420第3号準拠 ／ 約1.5時間</a:t>
+              <a:t>安衛則第612条の2・基発0318第1号準拠 ／ 約1.5時間</a:t>
             </a:r>
           </a:p>
         </p:txBody>
@@ -3464,7 +3464,7 @@
                 <a:latin typeface="Meiryo"/>
                 <a:ea typeface="Meiryo"/>
               </a:rPr>
-              <a:t>ANZEN AI ／ 労働安全コンサルタント（登録番号260022・土木）監修</a:t>
+              <a:t>安全AIポータル編集部｜労働安全コンサルタント監修</a:t>
             </a:r>
           </a:p>
         </p:txBody>
@@ -3504,7 +3504,7 @@
                 <a:latin typeface="Meiryo"/>
                 <a:ea typeface="Meiryo"/>
               </a:rPr>
-              <a:t>ANZEN AI</a:t>
+              <a:t>安全AIポータル</a:t>
             </a:r>
           </a:p>
         </p:txBody>
@@ -4646,7 +4646,7 @@
                 <a:latin typeface="Meiryo"/>
                 <a:ea typeface="Meiryo"/>
               </a:rPr>
-              <a:t>safe-ai-site.vercel.app/contact</a:t>
+              <a:t>anzen-ai-portal.jp/contact</a:t>
             </a:r>
           </a:p>
         </p:txBody>
@@ -4686,7 +4686,7 @@
                 <a:latin typeface="Meiryo"/>
                 <a:ea typeface="Meiryo"/>
               </a:rPr>
-              <a:t>ANZEN AI ／ 労働安全コンサルタント（登録番号260022・土木）監修</a:t>
+              <a:t>安全AIポータル編集部｜労働安全コンサルタント監修</a:t>
             </a:r>
           </a:p>
         </p:txBody>
@@ -6128,7 +6128,7 @@
                 <a:latin typeface="Meiryo"/>
                 <a:ea typeface="Meiryo"/>
               </a:rPr>
-              <a:t>ANZEN AI ／ 労働安全コンサルタント（登録番号260022・土木）監修</a:t>
+              <a:t>安全AIポータル編集部｜労働安全コンサルタント監修</a:t>
             </a:r>
           </a:p>
         </p:txBody>
@@ -7518,7 +7518,7 @@
                 <a:latin typeface="Meiryo"/>
                 <a:ea typeface="Meiryo"/>
               </a:rPr>
-              <a:t>ANZEN AI ／ 労働安全コンサルタント（登録番号260022・土木）監修</a:t>
+              <a:t>安全AIポータル編集部｜労働安全コンサルタント監修</a:t>
             </a:r>
           </a:p>
         </p:txBody>
@@ -8620,7 +8620,7 @@
                 <a:latin typeface="Meiryo"/>
                 <a:ea typeface="Meiryo"/>
               </a:rPr>
-              <a:t>ANZEN AI ／ 労働安全コンサルタント（登録番号260022・土木）監修</a:t>
+              <a:t>安全AIポータル編集部｜労働安全コンサルタント監修</a:t>
             </a:r>
           </a:p>
         </p:txBody>
@@ -10898,7 +10898,7 @@
                 <a:latin typeface="Meiryo"/>
                 <a:ea typeface="Meiryo"/>
               </a:rPr>
-              <a:t>出典：JIS Z 8504 ／ 基発0420第3号 別添「職場における熱中症予防基本対策要綱」より要約</a:t>
+              <a:t>出典：JIS Z 8504 ／ 基発0318第1号「職場における熱中症対策のためのガイドライン」別紙より要約</a:t>
             </a:r>
           </a:p>
         </p:txBody>
@@ -10938,7 +10938,7 @@
                 <a:latin typeface="Meiryo"/>
                 <a:ea typeface="Meiryo"/>
               </a:rPr>
-              <a:t>ANZEN AI ／ 労働安全コンサルタント（登録番号260022・土木）監修</a:t>
+              <a:t>安全AIポータル編集部｜労働安全コンサルタント監修</a:t>
             </a:r>
           </a:p>
         </p:txBody>
@@ -12377,7 +12377,7 @@
                 <a:latin typeface="Meiryo"/>
                 <a:ea typeface="Meiryo"/>
               </a:rPr>
-              <a:t>ANZEN AI ／ 労働安全コンサルタント（登録番号260022・土木）監修</a:t>
+              <a:t>安全AIポータル編集部｜労働安全コンサルタント監修</a:t>
             </a:r>
           </a:p>
         </p:txBody>
@@ -14251,7 +14251,7 @@
                 <a:latin typeface="Meiryo"/>
                 <a:ea typeface="Meiryo"/>
               </a:rPr>
-              <a:t>ANZEN AI ／ 労働安全コンサルタント（登録番号260022・土木）監修</a:t>
+              <a:t>安全AIポータル編集部｜労働安全コンサルタント監修</a:t>
             </a:r>
           </a:p>
         </p:txBody>
@@ -15563,7 +15563,7 @@
                 <a:latin typeface="Meiryo"/>
                 <a:ea typeface="Meiryo"/>
               </a:rPr>
-              <a:t>ANZEN AI ／ 労働安全コンサルタント（登録番号260022・土木）監修</a:t>
+              <a:t>安全AIポータル編集部｜労働安全コンサルタント監修</a:t>
             </a:r>
           </a:p>
         </p:txBody>
@@ -15785,7 +15785,7 @@
                 <a:latin typeface="Meiryo"/>
                 <a:ea typeface="Meiryo"/>
               </a:rPr>
-              <a:t>安衛法第22条・第59条および基発0420第3号、2025年6月1日施行の安衛則改正に基づく取組み</a:t>
+              <a:t>安衛法第22条および安衛則第612条の2（2025年6月1日施行）・基発0318第1号ガイドラインに基づく取組み</a:t>
             </a:r>
           </a:p>
         </p:txBody>
@@ -16665,7 +16665,7 @@
                 <a:latin typeface="Meiryo"/>
                 <a:ea typeface="Meiryo"/>
               </a:rPr>
-              <a:t>ANZEN AI ／ 労働安全コンサルタント（登録番号260022・土木）監修</a:t>
+              <a:t>安全AIポータル編集部｜労働安全コンサルタント監修</a:t>
             </a:r>
           </a:p>
         </p:txBody>
